--- a/curso_es/pptx/S01.pptx
+++ b/curso_es/pptx/S01.pptx
@@ -4106,7 +4106,7 @@
                 </a:solidFill>
                 <a:latin typeface="Nunito Sans"/>
               </a:rPr>
-              <a:t>Aitor presume: «Yo pienso críticamente: a los profes siempre les llevo la contraria».</a:t>
+              <a:t>Un chico presume: «Yo pienso críticamente: a los profes siempre les llevo la contraria».</a:t>
             </a:r>
           </a:p>
         </p:txBody>
@@ -7326,7 +7326,7 @@
                 </a:solidFill>
                 <a:latin typeface="Nunito Sans"/>
               </a:rPr>
-              <a:t>Leire dice que el examen de Matemáticas es el jueves: lo apuntó en la agenda cuando lo dijo la profesora.</a:t>
+              <a:t>Una compañera dice que el examen de Matemáticas es el jueves: lo apuntó en la agenda cuando lo dijo la profesora.</a:t>
             </a:r>
           </a:p>
         </p:txBody>
